--- a/EK_Harrys_Salon.pptx
+++ b/EK_Harrys_Salon.pptx
@@ -5,16 +5,17 @@
     <p:sldMasterId id="2147483648" r:id="rId4"/>
   </p:sldMasterIdLst>
   <p:notesMasterIdLst>
-    <p:notesMasterId r:id="rId9"/>
+    <p:notesMasterId r:id="rId10"/>
   </p:notesMasterIdLst>
   <p:handoutMasterIdLst>
-    <p:handoutMasterId r:id="rId10"/>
+    <p:handoutMasterId r:id="rId11"/>
   </p:handoutMasterIdLst>
   <p:sldIdLst>
     <p:sldId id="256" r:id="rId5"/>
     <p:sldId id="257" r:id="rId6"/>
     <p:sldId id="274" r:id="rId7"/>
-    <p:sldId id="270" r:id="rId8"/>
+    <p:sldId id="275" r:id="rId8"/>
+    <p:sldId id="270" r:id="rId9"/>
   </p:sldIdLst>
   <p:sldSz cx="9144000" cy="5143500" type="screen16x9"/>
   <p:notesSz cx="5143500" cy="9144000"/>
@@ -943,7 +944,21 @@
             <p:ph type="sldImg"/>
           </p:nvPr>
         </p:nvSpPr>
-        <p:spPr/>
+        <p:spPr>
+          <a:xfrm>
+            <a:off x="-171450" y="1143000"/>
+            <a:ext cx="5486400" cy="3086100"/>
+          </a:xfrm>
+          <a:prstGeom prst="rect">
+            <a:avLst/>
+          </a:prstGeom>
+          <a:noFill/>
+          <a:ln w="12700">
+            <a:solidFill>
+              <a:prstClr val="black"/>
+            </a:solidFill>
+          </a:ln>
+        </p:spPr>
       </p:sp>
       <p:sp>
         <p:nvSpPr>
@@ -955,6 +970,173 @@
             <p:ph type="body" idx="1"/>
           </p:nvPr>
         </p:nvSpPr>
+        <p:spPr>
+          <a:xfrm>
+            <a:off x="514350" y="4400550"/>
+            <a:ext cx="4114800" cy="3600450"/>
+          </a:xfrm>
+          <a:prstGeom prst="rect">
+            <a:avLst/>
+          </a:prstGeom>
+        </p:spPr>
+        <p:txBody>
+          <a:bodyPr/>
+          <a:lstStyle/>
+          <a:p>
+            <a:r>
+              <a:rPr lang="da-DK" dirty="0"/>
+              <a:t>Obs:</a:t>
+            </a:r>
+            <a:br>
+              <a:rPr lang="da-DK" dirty="0"/>
+            </a:br>
+            <a:r>
+              <a:rPr lang="da-DK" dirty="0"/>
+              <a:t>Er customers stakeholders?</a:t>
+            </a:r>
+            <a:endParaRPr lang="en-DK" dirty="0"/>
+          </a:p>
+        </p:txBody>
+      </p:sp>
+    </p:spTree>
+    <p:extLst>
+      <p:ext uri="{BB962C8B-B14F-4D97-AF65-F5344CB8AC3E}">
+        <p14:creationId xmlns:p14="http://schemas.microsoft.com/office/powerpoint/2010/main" val="3075118906"/>
+      </p:ext>
+    </p:extLst>
+  </p:cSld>
+  <p:clrMapOvr>
+    <a:masterClrMapping/>
+  </p:clrMapOvr>
+</p:notes>
+</file>
+
+<file path=ppt/notesSlides/notesSlide4.xml><?xml version="1.0" encoding="utf-8"?>
+<p:notes xmlns:a="http://schemas.openxmlformats.org/drawingml/2006/main" xmlns:r="http://schemas.openxmlformats.org/officeDocument/2006/relationships" xmlns:p="http://schemas.openxmlformats.org/presentationml/2006/main">
+  <p:cSld>
+    <p:spTree>
+      <p:nvGrpSpPr>
+        <p:cNvPr id="1" name=""/>
+        <p:cNvGrpSpPr/>
+        <p:nvPr/>
+      </p:nvGrpSpPr>
+      <p:grpSpPr>
+        <a:xfrm>
+          <a:off x="0" y="0"/>
+          <a:ext cx="0" cy="0"/>
+          <a:chOff x="0" y="0"/>
+          <a:chExt cx="0" cy="0"/>
+        </a:xfrm>
+      </p:grpSpPr>
+      <p:sp>
+        <p:nvSpPr>
+          <p:cNvPr id="2" name="Slide Image Placeholder 1"/>
+          <p:cNvSpPr>
+            <a:spLocks noGrp="1" noRot="1" noChangeAspect="1"/>
+          </p:cNvSpPr>
+          <p:nvPr>
+            <p:ph type="sldImg"/>
+          </p:nvPr>
+        </p:nvSpPr>
+        <p:spPr>
+          <a:xfrm>
+            <a:off x="-171450" y="1143000"/>
+            <a:ext cx="5486400" cy="3086100"/>
+          </a:xfrm>
+          <a:prstGeom prst="rect">
+            <a:avLst/>
+          </a:prstGeom>
+          <a:noFill/>
+          <a:ln w="12700">
+            <a:solidFill>
+              <a:prstClr val="black"/>
+            </a:solidFill>
+          </a:ln>
+        </p:spPr>
+      </p:sp>
+      <p:sp>
+        <p:nvSpPr>
+          <p:cNvPr id="3" name="Notes Placeholder 2"/>
+          <p:cNvSpPr>
+            <a:spLocks noGrp="1"/>
+          </p:cNvSpPr>
+          <p:nvPr>
+            <p:ph type="body" idx="1"/>
+          </p:nvPr>
+        </p:nvSpPr>
+        <p:spPr>
+          <a:xfrm>
+            <a:off x="514350" y="4400550"/>
+            <a:ext cx="4114800" cy="3600450"/>
+          </a:xfrm>
+          <a:prstGeom prst="rect">
+            <a:avLst/>
+          </a:prstGeom>
+        </p:spPr>
+        <p:txBody>
+          <a:bodyPr/>
+          <a:lstStyle/>
+          <a:p>
+            <a:r>
+              <a:rPr lang="da-DK" dirty="0"/>
+              <a:t>Obs. Skal ”closed-day logic” være i opportunities?</a:t>
+            </a:r>
+            <a:endParaRPr lang="en-DK" dirty="0"/>
+          </a:p>
+        </p:txBody>
+      </p:sp>
+    </p:spTree>
+    <p:extLst>
+      <p:ext uri="{BB962C8B-B14F-4D97-AF65-F5344CB8AC3E}">
+        <p14:creationId xmlns:p14="http://schemas.microsoft.com/office/powerpoint/2010/main" val="2866874680"/>
+      </p:ext>
+    </p:extLst>
+  </p:cSld>
+  <p:clrMapOvr>
+    <a:masterClrMapping/>
+  </p:clrMapOvr>
+</p:notes>
+</file>
+
+<file path=ppt/notesSlides/notesSlide5.xml><?xml version="1.0" encoding="utf-8"?>
+<p:notes xmlns:a="http://schemas.openxmlformats.org/drawingml/2006/main" xmlns:r="http://schemas.openxmlformats.org/officeDocument/2006/relationships" xmlns:p="http://schemas.openxmlformats.org/presentationml/2006/main">
+  <p:cSld>
+    <p:spTree>
+      <p:nvGrpSpPr>
+        <p:cNvPr id="1" name=""/>
+        <p:cNvGrpSpPr/>
+        <p:nvPr/>
+      </p:nvGrpSpPr>
+      <p:grpSpPr>
+        <a:xfrm>
+          <a:off x="0" y="0"/>
+          <a:ext cx="0" cy="0"/>
+          <a:chOff x="0" y="0"/>
+          <a:chExt cx="0" cy="0"/>
+        </a:xfrm>
+      </p:grpSpPr>
+      <p:sp>
+        <p:nvSpPr>
+          <p:cNvPr id="2" name="Slide Image Placeholder 1"/>
+          <p:cNvSpPr>
+            <a:spLocks noGrp="1" noRot="1" noChangeAspect="1"/>
+          </p:cNvSpPr>
+          <p:nvPr>
+            <p:ph type="sldImg"/>
+          </p:nvPr>
+        </p:nvSpPr>
+        <p:spPr/>
+      </p:sp>
+      <p:sp>
+        <p:nvSpPr>
+          <p:cNvPr id="3" name="Notes Placeholder 2"/>
+          <p:cNvSpPr>
+            <a:spLocks noGrp="1"/>
+          </p:cNvSpPr>
+          <p:nvPr>
+            <p:ph type="body" idx="1"/>
+          </p:nvPr>
+        </p:nvSpPr>
         <p:spPr/>
         <p:txBody>
           <a:bodyPr/>
@@ -984,7 +1166,7 @@
           <a:p>
             <a:fld id="{F7021451-1387-4CA6-816F-3879F97B5CBC}" type="slidenum">
               <a:rPr lang="en-US"/>
-              <a:t>4</a:t>
+              <a:t>5</a:t>
             </a:fld>
             <a:endParaRPr lang="en-US"/>
           </a:p>
@@ -2670,7 +2852,7 @@
                 <a:ea typeface="Aptos Serif" pitchFamily="34" charset="-122"/>
                 <a:cs typeface="Aptos Serif" pitchFamily="34" charset="-120"/>
               </a:rPr>
-              <a:t>The Problem</a:t>
+              <a:t>Stakeholder analysis</a:t>
             </a:r>
             <a:endParaRPr lang="en-US" sz="2800" dirty="0"/>
           </a:p>
@@ -2714,21 +2896,143 @@
                   <a:srgbClr val="33ABB5"/>
                 </a:solidFill>
                 <a:latin typeface="Calibri" pitchFamily="34" charset="0"/>
-                <a:ea typeface="Calibri" pitchFamily="34" charset="-122"/>
                 <a:cs typeface="Calibri" pitchFamily="34" charset="-120"/>
               </a:rPr>
-              <a:t>EK’s innovation lab tracks all loans on paper</a:t>
+              <a:t>Power-Interest Matrix – Harry’s</a:t>
             </a:r>
             <a:endParaRPr lang="en-US" sz="1500" dirty="0"/>
+          </a:p>
+        </p:txBody>
+      </p:sp>
+      <p:sp>
+        <p:nvSpPr>
+          <p:cNvPr id="5" name="TextBox 4">
+            <a:extLst>
+              <a:ext uri="{FF2B5EF4-FFF2-40B4-BE49-F238E27FC236}">
+                <a16:creationId xmlns:a16="http://schemas.microsoft.com/office/drawing/2014/main" id="{3288D970-8640-C9CE-857F-5C104225B7EE}"/>
+              </a:ext>
+            </a:extLst>
+          </p:cNvPr>
+          <p:cNvSpPr txBox="1"/>
+          <p:nvPr/>
+        </p:nvSpPr>
+        <p:spPr>
+          <a:xfrm>
+            <a:off x="141687" y="1260629"/>
+            <a:ext cx="3687676" cy="2185214"/>
+          </a:xfrm>
+          <a:prstGeom prst="rect">
+            <a:avLst/>
+          </a:prstGeom>
+          <a:noFill/>
+        </p:spPr>
+        <p:txBody>
+          <a:bodyPr wrap="none" rtlCol="0">
+            <a:spAutoFit/>
+          </a:bodyPr>
+          <a:lstStyle/>
+          <a:p>
+            <a:r>
+              <a:rPr lang="da-DK" sz="1700" b="1" dirty="0"/>
+              <a:t>Harry – </a:t>
+            </a:r>
+            <a:r>
+              <a:rPr lang="da-DK" sz="1700" dirty="0"/>
+              <a:t>Involve in Sprint review, </a:t>
+            </a:r>
+            <a:br>
+              <a:rPr lang="da-DK" sz="1700" dirty="0"/>
+            </a:br>
+            <a:r>
+              <a:rPr lang="en-GB" sz="1700" dirty="0"/>
+              <a:t>primary decision-maker on scope</a:t>
+            </a:r>
+          </a:p>
+          <a:p>
+            <a:endParaRPr lang="en-GB" sz="1700" b="1" dirty="0"/>
+          </a:p>
+          <a:p>
+            <a:r>
+              <a:rPr lang="en-GB" sz="1700" b="1" dirty="0"/>
+              <a:t>Revisor – </a:t>
+            </a:r>
+            <a:r>
+              <a:rPr lang="en-GB" sz="1700" dirty="0"/>
+              <a:t>deliver financial view cleanly,</a:t>
+            </a:r>
+            <a:br>
+              <a:rPr lang="en-GB" sz="1700" dirty="0"/>
+            </a:br>
+            <a:r>
+              <a:rPr lang="en-GB" sz="1700" dirty="0"/>
+              <a:t>keep interface simple</a:t>
+            </a:r>
+          </a:p>
+          <a:p>
+            <a:endParaRPr lang="en-GB" sz="1700" b="1" dirty="0"/>
+          </a:p>
+          <a:p>
+            <a:r>
+              <a:rPr lang="da-DK" sz="1700" b="1" dirty="0"/>
+              <a:t>Harriet – </a:t>
+            </a:r>
+            <a:r>
+              <a:rPr lang="da-DK" sz="1700" dirty="0"/>
+              <a:t>demo each sprint,</a:t>
+            </a:r>
+            <a:br>
+              <a:rPr lang="da-DK" sz="1700" dirty="0"/>
+            </a:br>
+            <a:r>
+              <a:rPr lang="da-DK" sz="1700" dirty="0"/>
+              <a:t>ensure booking flow works for daily use</a:t>
+            </a:r>
+            <a:endParaRPr lang="en-DK" sz="1700" b="1" dirty="0"/>
+          </a:p>
+        </p:txBody>
+      </p:sp>
+      <p:sp>
+        <p:nvSpPr>
+          <p:cNvPr id="6" name="TextBox 5">
+            <a:extLst>
+              <a:ext uri="{FF2B5EF4-FFF2-40B4-BE49-F238E27FC236}">
+                <a16:creationId xmlns:a16="http://schemas.microsoft.com/office/drawing/2014/main" id="{6D45AF20-444D-69D4-BE58-C5500BC39B9A}"/>
+              </a:ext>
+            </a:extLst>
+          </p:cNvPr>
+          <p:cNvSpPr txBox="1"/>
+          <p:nvPr/>
+        </p:nvSpPr>
+        <p:spPr>
+          <a:xfrm>
+            <a:off x="220195" y="3328873"/>
+            <a:ext cx="3105307" cy="553998"/>
+          </a:xfrm>
+          <a:prstGeom prst="rect">
+            <a:avLst/>
+          </a:prstGeom>
+          <a:noFill/>
+        </p:spPr>
+        <p:txBody>
+          <a:bodyPr wrap="square" rtlCol="0">
+            <a:spAutoFit/>
+          </a:bodyPr>
+          <a:lstStyle/>
+          <a:p>
+            <a:r>
+              <a:rPr lang="en-GB" sz="1000" dirty="0"/>
+              <a:t>Harriet handles the majority of incoming booking calls after school hours — UI clarity in the booking flow is critical to her daily efficiency."</a:t>
+            </a:r>
+            <a:endParaRPr lang="en-DK" sz="1000" dirty="0"/>
           </a:p>
         </p:txBody>
       </p:sp>
       <p:pic>
         <p:nvPicPr>
-          <p:cNvPr id="9" name="Graphic 8">
+          <p:cNvPr id="8" name="Graphic 7">
             <a:extLst>
               <a:ext uri="{FF2B5EF4-FFF2-40B4-BE49-F238E27FC236}">
-                <a16:creationId xmlns:a16="http://schemas.microsoft.com/office/drawing/2014/main" id="{6DDE902D-C832-999A-AB20-CA0D868D748B}"/>
+                <a16:creationId xmlns:a16="http://schemas.microsoft.com/office/drawing/2014/main" id="{C989CFE1-4852-9310-9069-4F11252814BB}"/>
               </a:ext>
             </a:extLst>
           </p:cNvPr>
@@ -2738,10 +3042,10 @@
           <p:nvPr/>
         </p:nvPicPr>
         <p:blipFill>
-          <a:blip r:embed="rId2">
+          <a:blip r:embed="rId3">
             <a:extLst>
               <a:ext uri="{96DAC541-7B7A-43D3-8B79-37D633B846F1}">
-                <asvg:svgBlip xmlns:asvg="http://schemas.microsoft.com/office/drawing/2016/SVG/main" r:embed="rId3"/>
+                <asvg:svgBlip xmlns:asvg="http://schemas.microsoft.com/office/drawing/2016/SVG/main" r:embed="rId4"/>
               </a:ext>
             </a:extLst>
           </a:blip>
@@ -2751,8 +3055,8 @@
         </p:blipFill>
         <p:spPr>
           <a:xfrm>
-            <a:off x="2865254" y="316961"/>
-            <a:ext cx="6012771" cy="4509578"/>
+            <a:off x="3404009" y="300858"/>
+            <a:ext cx="5640938" cy="4230703"/>
           </a:xfrm>
           <a:prstGeom prst="rect">
             <a:avLst/>
@@ -2773,6 +3077,417 @@
 </file>
 
 <file path=ppt/slides/slide4.xml><?xml version="1.0" encoding="utf-8"?>
+<p:sld xmlns:a="http://schemas.openxmlformats.org/drawingml/2006/main" xmlns:r="http://schemas.openxmlformats.org/officeDocument/2006/relationships" xmlns:p="http://schemas.openxmlformats.org/presentationml/2006/main">
+  <p:cSld>
+    <p:spTree>
+      <p:nvGrpSpPr>
+        <p:cNvPr id="1" name=""/>
+        <p:cNvGrpSpPr/>
+        <p:nvPr/>
+      </p:nvGrpSpPr>
+      <p:grpSpPr>
+        <a:xfrm>
+          <a:off x="0" y="0"/>
+          <a:ext cx="0" cy="0"/>
+          <a:chOff x="0" y="0"/>
+          <a:chExt cx="0" cy="0"/>
+        </a:xfrm>
+      </p:grpSpPr>
+      <p:sp>
+        <p:nvSpPr>
+          <p:cNvPr id="2" name="Slide Number Placeholder 1">
+            <a:extLst>
+              <a:ext uri="{FF2B5EF4-FFF2-40B4-BE49-F238E27FC236}">
+                <a16:creationId xmlns:a16="http://schemas.microsoft.com/office/drawing/2014/main" id="{1CAC7BC0-C229-605C-9B69-72CB63A8568A}"/>
+              </a:ext>
+            </a:extLst>
+          </p:cNvPr>
+          <p:cNvSpPr>
+            <a:spLocks noGrp="1"/>
+          </p:cNvSpPr>
+          <p:nvPr>
+            <p:ph type="sldNum" sz="quarter" idx="11"/>
+          </p:nvPr>
+        </p:nvSpPr>
+        <p:spPr/>
+        <p:txBody>
+          <a:bodyPr/>
+          <a:lstStyle/>
+          <a:p>
+            <a:fld id="{360F3691-69B6-45D9-BFDC-87492A06AC7E}" type="slidenum">
+              <a:rPr lang="en-DK" smtClean="0"/>
+              <a:t>4</a:t>
+            </a:fld>
+            <a:endParaRPr lang="en-DK"/>
+          </a:p>
+        </p:txBody>
+      </p:sp>
+      <p:pic>
+        <p:nvPicPr>
+          <p:cNvPr id="13" name="Graphic 12">
+            <a:extLst>
+              <a:ext uri="{FF2B5EF4-FFF2-40B4-BE49-F238E27FC236}">
+                <a16:creationId xmlns:a16="http://schemas.microsoft.com/office/drawing/2014/main" id="{77ADCC74-0FA6-24D5-4B5E-59A23C2FC8B9}"/>
+              </a:ext>
+            </a:extLst>
+          </p:cNvPr>
+          <p:cNvPicPr>
+            <a:picLocks noChangeAspect="1"/>
+          </p:cNvPicPr>
+          <p:nvPr/>
+        </p:nvPicPr>
+        <p:blipFill>
+          <a:blip r:embed="rId3">
+            <a:extLst>
+              <a:ext uri="{96DAC541-7B7A-43D3-8B79-37D633B846F1}">
+                <asvg:svgBlip xmlns:asvg="http://schemas.microsoft.com/office/drawing/2016/SVG/main" r:embed="rId4"/>
+              </a:ext>
+            </a:extLst>
+          </a:blip>
+          <a:stretch>
+            <a:fillRect/>
+          </a:stretch>
+        </p:blipFill>
+        <p:spPr>
+          <a:xfrm>
+            <a:off x="3045037" y="475488"/>
+            <a:ext cx="6283941" cy="4300653"/>
+          </a:xfrm>
+          <a:prstGeom prst="rect">
+            <a:avLst/>
+          </a:prstGeom>
+        </p:spPr>
+      </p:pic>
+      <p:sp>
+        <p:nvSpPr>
+          <p:cNvPr id="6" name="Text 1">
+            <a:extLst>
+              <a:ext uri="{FF2B5EF4-FFF2-40B4-BE49-F238E27FC236}">
+                <a16:creationId xmlns:a16="http://schemas.microsoft.com/office/drawing/2014/main" id="{978CAF26-43FF-2BDF-4BDD-EF6A6B4E6B8C}"/>
+              </a:ext>
+            </a:extLst>
+          </p:cNvPr>
+          <p:cNvSpPr/>
+          <p:nvPr/>
+        </p:nvSpPr>
+        <p:spPr>
+          <a:xfrm>
+            <a:off x="292608" y="0"/>
+            <a:ext cx="5029200" cy="475488"/>
+          </a:xfrm>
+          <a:prstGeom prst="rect">
+            <a:avLst/>
+          </a:prstGeom>
+          <a:noFill/>
+          <a:ln/>
+        </p:spPr>
+        <p:txBody>
+          <a:bodyPr wrap="square" lIns="0" tIns="0" rIns="0" bIns="0" rtlCol="0" anchor="ctr"/>
+          <a:lstStyle/>
+          <a:p>
+            <a:pPr marL="0" indent="0" algn="l">
+              <a:buNone/>
+            </a:pPr>
+            <a:r>
+              <a:rPr lang="en-US" sz="2800" i="1" dirty="0">
+                <a:solidFill>
+                  <a:srgbClr val="0038A8"/>
+                </a:solidFill>
+                <a:latin typeface="Aptos Serif" pitchFamily="34" charset="0"/>
+                <a:ea typeface="Aptos Serif" pitchFamily="34" charset="-122"/>
+                <a:cs typeface="Aptos Serif" pitchFamily="34" charset="-120"/>
+              </a:rPr>
+              <a:t>SWOT analysis</a:t>
+            </a:r>
+            <a:endParaRPr lang="en-US" sz="2800" dirty="0"/>
+          </a:p>
+        </p:txBody>
+      </p:sp>
+      <p:sp>
+        <p:nvSpPr>
+          <p:cNvPr id="7" name="Text 2">
+            <a:extLst>
+              <a:ext uri="{FF2B5EF4-FFF2-40B4-BE49-F238E27FC236}">
+                <a16:creationId xmlns:a16="http://schemas.microsoft.com/office/drawing/2014/main" id="{0F90A249-B190-7914-D70F-2E400D063289}"/>
+              </a:ext>
+            </a:extLst>
+          </p:cNvPr>
+          <p:cNvSpPr>
+            <a:spLocks/>
+          </p:cNvSpPr>
+          <p:nvPr/>
+        </p:nvSpPr>
+        <p:spPr>
+          <a:xfrm>
+            <a:off x="5029200" y="0"/>
+            <a:ext cx="3977640" cy="475488"/>
+          </a:xfrm>
+          <a:prstGeom prst="rect">
+            <a:avLst/>
+          </a:prstGeom>
+          <a:noFill/>
+          <a:ln/>
+        </p:spPr>
+        <p:txBody>
+          <a:bodyPr wrap="square" lIns="0" tIns="0" rIns="0" bIns="0" rtlCol="0" anchor="ctr"/>
+          <a:lstStyle/>
+          <a:p>
+            <a:pPr marL="0" indent="0" algn="r">
+              <a:buNone/>
+            </a:pPr>
+            <a:r>
+              <a:rPr lang="en-US" sz="1500" i="1" dirty="0">
+                <a:solidFill>
+                  <a:srgbClr val="33ABB5"/>
+                </a:solidFill>
+                <a:latin typeface="Calibri" pitchFamily="34" charset="0"/>
+                <a:ea typeface="Calibri" pitchFamily="34" charset="-122"/>
+                <a:cs typeface="Calibri" pitchFamily="34" charset="-120"/>
+              </a:rPr>
+              <a:t>Harry’s Salon</a:t>
+            </a:r>
+            <a:endParaRPr lang="en-US" sz="1500" dirty="0"/>
+          </a:p>
+        </p:txBody>
+      </p:sp>
+      <p:sp>
+        <p:nvSpPr>
+          <p:cNvPr id="9" name="TextBox 8">
+            <a:extLst>
+              <a:ext uri="{FF2B5EF4-FFF2-40B4-BE49-F238E27FC236}">
+                <a16:creationId xmlns:a16="http://schemas.microsoft.com/office/drawing/2014/main" id="{2D4ED382-2FEF-EE37-3E59-DBC0853D26EA}"/>
+              </a:ext>
+            </a:extLst>
+          </p:cNvPr>
+          <p:cNvSpPr txBox="1"/>
+          <p:nvPr/>
+        </p:nvSpPr>
+        <p:spPr>
+          <a:xfrm>
+            <a:off x="6249142" y="2813765"/>
+            <a:ext cx="2266208" cy="977191"/>
+          </a:xfrm>
+          <a:prstGeom prst="rect">
+            <a:avLst/>
+          </a:prstGeom>
+          <a:noFill/>
+        </p:spPr>
+        <p:txBody>
+          <a:bodyPr wrap="square">
+            <a:spAutoFit/>
+          </a:bodyPr>
+          <a:lstStyle/>
+          <a:p>
+            <a:r>
+              <a:rPr lang="en-GB" sz="1150" dirty="0"/>
+              <a:t>— Adoption resistance if UI is confusing</a:t>
+            </a:r>
+            <a:br>
+              <a:rPr lang="en-GB" sz="1150" dirty="0"/>
+            </a:br>
+            <a:r>
+              <a:rPr lang="en-GB" sz="1150" dirty="0"/>
+              <a:t>— Data loss if file persistence fails</a:t>
+            </a:r>
+            <a:br>
+              <a:rPr lang="en-GB" sz="1150" dirty="0"/>
+            </a:br>
+            <a:r>
+              <a:rPr lang="en-GB" sz="1150" dirty="0"/>
+              <a:t>— Scope creep from nice-to-haves</a:t>
+            </a:r>
+            <a:br>
+              <a:rPr lang="en-GB" sz="1150" dirty="0"/>
+            </a:br>
+            <a:endParaRPr lang="en-DK" sz="1150" dirty="0"/>
+          </a:p>
+        </p:txBody>
+      </p:sp>
+      <p:sp>
+        <p:nvSpPr>
+          <p:cNvPr id="11" name="TextBox 10">
+            <a:extLst>
+              <a:ext uri="{FF2B5EF4-FFF2-40B4-BE49-F238E27FC236}">
+                <a16:creationId xmlns:a16="http://schemas.microsoft.com/office/drawing/2014/main" id="{F3B8F563-DE38-7DEA-6644-05D91CF487C7}"/>
+              </a:ext>
+            </a:extLst>
+          </p:cNvPr>
+          <p:cNvSpPr txBox="1"/>
+          <p:nvPr/>
+        </p:nvSpPr>
+        <p:spPr>
+          <a:xfrm>
+            <a:off x="3807791" y="2813765"/>
+            <a:ext cx="2379216" cy="1154162"/>
+          </a:xfrm>
+          <a:prstGeom prst="rect">
+            <a:avLst/>
+          </a:prstGeom>
+          <a:noFill/>
+        </p:spPr>
+        <p:txBody>
+          <a:bodyPr wrap="square">
+            <a:spAutoFit/>
+          </a:bodyPr>
+          <a:lstStyle/>
+          <a:p>
+            <a:r>
+              <a:rPr lang="en-GB" sz="1150" dirty="0"/>
+              <a:t>— Digital records enable statistics</a:t>
+            </a:r>
+            <a:br>
+              <a:rPr lang="en-GB" sz="1150" dirty="0"/>
+            </a:br>
+            <a:r>
+              <a:rPr lang="en-GB" sz="1150" dirty="0"/>
+              <a:t>— Foundation for future online booking</a:t>
+            </a:r>
+            <a:br>
+              <a:rPr lang="en-GB" sz="1150" dirty="0"/>
+            </a:br>
+            <a:r>
+              <a:rPr lang="en-GB" sz="1150" dirty="0"/>
+              <a:t>— Payment history improves forecasting</a:t>
+            </a:r>
+            <a:br>
+              <a:rPr lang="en-GB" sz="1150" dirty="0"/>
+            </a:br>
+            <a:r>
+              <a:rPr lang="en-GB" sz="1150" dirty="0"/>
+              <a:t>— Closed-day logic reduces errors</a:t>
+            </a:r>
+            <a:endParaRPr lang="en-DK" sz="1150" dirty="0"/>
+          </a:p>
+        </p:txBody>
+      </p:sp>
+      <p:sp>
+        <p:nvSpPr>
+          <p:cNvPr id="20" name="TextBox 19">
+            <a:extLst>
+              <a:ext uri="{FF2B5EF4-FFF2-40B4-BE49-F238E27FC236}">
+                <a16:creationId xmlns:a16="http://schemas.microsoft.com/office/drawing/2014/main" id="{7E569360-CD5A-17D5-23FC-88231CC67B97}"/>
+              </a:ext>
+            </a:extLst>
+          </p:cNvPr>
+          <p:cNvSpPr txBox="1"/>
+          <p:nvPr/>
+        </p:nvSpPr>
+        <p:spPr>
+          <a:xfrm>
+            <a:off x="3839592" y="1007953"/>
+            <a:ext cx="2379216" cy="1508105"/>
+          </a:xfrm>
+          <a:prstGeom prst="rect">
+            <a:avLst/>
+          </a:prstGeom>
+          <a:noFill/>
+        </p:spPr>
+        <p:txBody>
+          <a:bodyPr wrap="square">
+            <a:spAutoFit/>
+          </a:bodyPr>
+          <a:lstStyle/>
+          <a:p>
+            <a:r>
+              <a:rPr lang="en-GB" sz="1150" dirty="0"/>
+              <a:t>— Console-based / low technical barrier</a:t>
+            </a:r>
+          </a:p>
+          <a:p>
+            <a:r>
+              <a:rPr lang="en-GB" sz="1150" dirty="0"/>
+              <a:t>— Revisor gets direct access to financial records, no manual cross-checking</a:t>
+            </a:r>
+          </a:p>
+          <a:p>
+            <a:r>
+              <a:rPr lang="en-GB" sz="1150" dirty="0"/>
+              <a:t>— Both Harry/Harriet can manage bookings</a:t>
+            </a:r>
+          </a:p>
+          <a:p>
+            <a:r>
+              <a:rPr lang="en-GB" sz="1150" dirty="0"/>
+              <a:t>— File persistence </a:t>
+            </a:r>
+            <a:endParaRPr lang="en-DK" sz="1150" dirty="0"/>
+          </a:p>
+        </p:txBody>
+      </p:sp>
+      <p:sp>
+        <p:nvSpPr>
+          <p:cNvPr id="21" name="TextBox 20">
+            <a:extLst>
+              <a:ext uri="{FF2B5EF4-FFF2-40B4-BE49-F238E27FC236}">
+                <a16:creationId xmlns:a16="http://schemas.microsoft.com/office/drawing/2014/main" id="{808B4BD4-E18C-B8F4-2BD0-426D724734F2}"/>
+              </a:ext>
+            </a:extLst>
+          </p:cNvPr>
+          <p:cNvSpPr txBox="1"/>
+          <p:nvPr/>
+        </p:nvSpPr>
+        <p:spPr>
+          <a:xfrm>
+            <a:off x="6192638" y="1003852"/>
+            <a:ext cx="2379216" cy="977191"/>
+          </a:xfrm>
+          <a:prstGeom prst="rect">
+            <a:avLst/>
+          </a:prstGeom>
+          <a:noFill/>
+        </p:spPr>
+        <p:txBody>
+          <a:bodyPr wrap="square">
+            <a:spAutoFit/>
+          </a:bodyPr>
+          <a:lstStyle/>
+          <a:p>
+            <a:r>
+              <a:rPr lang="en-GB" sz="1150" dirty="0"/>
+              <a:t>— Low technical literacy of users</a:t>
+            </a:r>
+          </a:p>
+          <a:p>
+            <a:r>
+              <a:rPr lang="en-GB" sz="1150" dirty="0"/>
+              <a:t>— No existing digital data to migrate</a:t>
+            </a:r>
+          </a:p>
+          <a:p>
+            <a:r>
+              <a:rPr lang="en-GB" sz="1150" dirty="0"/>
+              <a:t>— Single laptop, no backup system</a:t>
+            </a:r>
+          </a:p>
+          <a:p>
+            <a:r>
+              <a:rPr lang="en-GB" sz="1150" dirty="0"/>
+              <a:t>— Manual calendar as fallback risk</a:t>
+            </a:r>
+          </a:p>
+          <a:p>
+            <a:r>
+              <a:rPr lang="en-GB" sz="1150" dirty="0"/>
+              <a:t>— No network, offline only</a:t>
+            </a:r>
+            <a:endParaRPr lang="en-DK" sz="1150" dirty="0"/>
+          </a:p>
+        </p:txBody>
+      </p:sp>
+    </p:spTree>
+    <p:extLst>
+      <p:ext uri="{BB962C8B-B14F-4D97-AF65-F5344CB8AC3E}">
+        <p14:creationId xmlns:p14="http://schemas.microsoft.com/office/powerpoint/2010/main" val="3597257923"/>
+      </p:ext>
+    </p:extLst>
+  </p:cSld>
+  <p:clrMapOvr>
+    <a:masterClrMapping/>
+  </p:clrMapOvr>
+</p:sld>
+</file>
+
+<file path=ppt/slides/slide5.xml><?xml version="1.0" encoding="utf-8"?>
 <p:sld xmlns:a="http://schemas.openxmlformats.org/drawingml/2006/main" xmlns:r="http://schemas.openxmlformats.org/officeDocument/2006/relationships" xmlns:p="http://schemas.openxmlformats.org/presentationml/2006/main">
   <p:cSld name="Slide 15">
     <p:bg>
@@ -4035,15 +4750,6 @@
 </file>
 
 <file path=customXml/item2.xml><?xml version="1.0" encoding="utf-8"?>
-<?mso-contentType ?>
-<FormTemplates xmlns="http://schemas.microsoft.com/sharepoint/v3/contenttype/forms">
-  <Display>DocumentLibraryForm</Display>
-  <Edit>DocumentLibraryForm</Edit>
-  <New>DocumentLibraryForm</New>
-</FormTemplates>
-</file>
-
-<file path=customXml/item3.xml><?xml version="1.0" encoding="utf-8"?>
 <ct:contentTypeSchema xmlns:ct="http://schemas.microsoft.com/office/2006/metadata/contentType" xmlns:ma="http://schemas.microsoft.com/office/2006/metadata/properties/metaAttributes" ct:_="" ma:_="" ma:contentTypeName="Dokument" ma:contentTypeID="0x01010094B90DD14E74FA4B8A0B61928CFDD39C" ma:contentTypeVersion="5" ma:contentTypeDescription="Opret et nyt dokument." ma:contentTypeScope="" ma:versionID="d27c0801c3e7a91114674d60a33c94d1">
   <xsd:schema xmlns:xsd="http://www.w3.org/2001/XMLSchema" xmlns:xs="http://www.w3.org/2001/XMLSchema" xmlns:p="http://schemas.microsoft.com/office/2006/metadata/properties" xmlns:ns3="ec348da0-b19e-4965-8681-ede4b8123f50" targetNamespace="http://schemas.microsoft.com/office/2006/metadata/properties" ma:root="true" ma:fieldsID="df88f89f19b9542b8d977b595c3bbff0" ns3:_="">
     <xsd:import namespace="ec348da0-b19e-4965-8681-ede4b8123f50"/>
@@ -4193,6 +4899,15 @@
 </ct:contentTypeSchema>
 </file>
 
+<file path=customXml/item3.xml><?xml version="1.0" encoding="utf-8"?>
+<?mso-contentType ?>
+<FormTemplates xmlns="http://schemas.microsoft.com/sharepoint/v3/contenttype/forms">
+  <Display>DocumentLibraryForm</Display>
+  <Edit>DocumentLibraryForm</Edit>
+  <New>DocumentLibraryForm</New>
+</FormTemplates>
+</file>
+
 <file path=customXml/itemProps1.xml><?xml version="1.0" encoding="utf-8"?>
 <ds:datastoreItem xmlns:ds="http://schemas.openxmlformats.org/officeDocument/2006/customXml" ds:itemID="{1517FA80-5B56-4410-8139-DF244F34DEC0}">
   <ds:schemaRefs>
@@ -4210,14 +4925,6 @@
 </file>
 
 <file path=customXml/itemProps2.xml><?xml version="1.0" encoding="utf-8"?>
-<ds:datastoreItem xmlns:ds="http://schemas.openxmlformats.org/officeDocument/2006/customXml" ds:itemID="{34B99400-01CC-4757-8B20-AF0C952C517C}">
-  <ds:schemaRefs>
-    <ds:schemaRef ds:uri="http://schemas.microsoft.com/sharepoint/v3/contenttype/forms"/>
-  </ds:schemaRefs>
-</ds:datastoreItem>
-</file>
-
-<file path=customXml/itemProps3.xml><?xml version="1.0" encoding="utf-8"?>
 <ds:datastoreItem xmlns:ds="http://schemas.openxmlformats.org/officeDocument/2006/customXml" ds:itemID="{C2AA4995-F2FF-4432-ACA4-BBA94215DDC0}">
   <ds:schemaRefs>
     <ds:schemaRef ds:uri="ec348da0-b19e-4965-8681-ede4b8123f50"/>
@@ -4233,4 +4940,12 @@
     <ds:schemaRef ds:uri="http://www.w3.org/2001/XMLSchema"/>
   </ds:schemaRefs>
 </ds:datastoreItem>
+</file>
+
+<file path=customXml/itemProps3.xml><?xml version="1.0" encoding="utf-8"?>
+<ds:datastoreItem xmlns:ds="http://schemas.openxmlformats.org/officeDocument/2006/customXml" ds:itemID="{34B99400-01CC-4757-8B20-AF0C952C517C}">
+  <ds:schemaRefs>
+    <ds:schemaRef ds:uri="http://schemas.microsoft.com/sharepoint/v3/contenttype/forms"/>
+  </ds:schemaRefs>
+</ds:datastoreItem>
 </file>